--- a/docs/customer-documents/federal-aan-series/Vol_VII_Book_05_FedAAN_ServiceNow_Compliance_App.pptx
+++ b/docs/customer-documents/federal-aan-series/Vol_VII_Book_05_FedAAN_ServiceNow_Compliance_App.pptx
@@ -586,7 +586,7 @@
           <a:lstStyle/>
           <a:p>
             <a:r>
-              <a:t>Motivate the deployable. Everything-as-code (Vol VI Book 00) means the app is an importable update set, its control map is machine-readable data, and its behavior is covered by runnable ATF tests. Set expectations honestly: this is a starter skeleton named x_ssa_fed_compliance — reviewed, completed per tenant, and tested in sub-prod before any production use, exactly like the DDI app skeleton already in the repo.</a:t>
+              <a:t>Motivate the deployable. Everything-as-code (Vol VI Book 00) means the app is an importable update set, its control map is machine-readable data, and its behavior is covered by runnable ATF tests. Set expectations honestly: this is a starter skeleton named x_fed_compliance — reviewed, completed per tenant, and tested in sub-prod before any production use, exactly like the DDI app skeleton already in the repo.</a:t>
             </a:r>
           </a:p>
         </p:txBody>
@@ -4877,7 +4877,7 @@
                 </a:solidFill>
                 <a:latin typeface="Arial"/>
               </a:rPr>
-              <a:t>Date Code: 2026-07-14 11:56 ET</a:t>
+              <a:t>Date Code: 2026-07-18 00:33 ET</a:t>
             </a:r>
           </a:p>
         </p:txBody>
@@ -5065,7 +5065,7 @@
                 </a:solidFill>
                 <a:latin typeface="Arial"/>
               </a:rPr>
-              <a:t>The ServiceNow Compliance App · Date Code: 2026-07-14 11:56 ET</a:t>
+              <a:t>The ServiceNow Compliance App · Date Code: 2026-07-18 00:33 ET</a:t>
             </a:r>
           </a:p>
         </p:txBody>
@@ -5288,7 +5288,7 @@
                 </a:solidFill>
                 <a:latin typeface="Arial"/>
               </a:rPr>
-              <a:t>The ServiceNow Compliance App · Date Code: 2026-07-14 11:56 ET</a:t>
+              <a:t>The ServiceNow Compliance App · Date Code: 2026-07-18 00:33 ET</a:t>
             </a:r>
           </a:p>
         </p:txBody>
@@ -6195,7 +6195,7 @@
                 </a:solidFill>
                 <a:latin typeface="Arial"/>
               </a:rPr>
-              <a:t>The ServiceNow Compliance App · Date Code: 2026-07-14 11:56 ET</a:t>
+              <a:t>The ServiceNow Compliance App · Date Code: 2026-07-18 00:33 ET</a:t>
             </a:r>
           </a:p>
         </p:txBody>
@@ -7057,7 +7057,7 @@
                 </a:solidFill>
                 <a:latin typeface="Arial"/>
               </a:rPr>
-              <a:t>Create x_ssa_fed_compliance (or import the update set) in a sub-prod instance; add the three Script Includes and the two REST Messages.
+              <a:t>Create x_fed_compliance (or import the update set) in a sub-prod instance; add the three Script Includes and the two REST Messages.
 </a:t>
             </a:r>
           </a:p>
@@ -7189,7 +7189,7 @@
                 </a:solidFill>
                 <a:latin typeface="Arial"/>
               </a:rPr>
-              <a:t>The ServiceNow Compliance App · Date Code: 2026-07-14 11:56 ET</a:t>
+              <a:t>The ServiceNow Compliance App · Date Code: 2026-07-18 00:33 ET</a:t>
             </a:r>
           </a:p>
         </p:txBody>
@@ -8183,7 +8183,7 @@
                 </a:solidFill>
                 <a:latin typeface="Arial"/>
               </a:rPr>
-              <a:t>The ServiceNow Compliance App · Date Code: 2026-07-14 11:56 ET</a:t>
+              <a:t>The ServiceNow Compliance App · Date Code: 2026-07-18 00:33 ET</a:t>
             </a:r>
           </a:p>
         </p:txBody>
@@ -9177,7 +9177,7 @@
                 </a:solidFill>
                 <a:latin typeface="Arial"/>
               </a:rPr>
-              <a:t>The ServiceNow Compliance App · Date Code: 2026-07-14 11:56 ET</a:t>
+              <a:t>The ServiceNow Compliance App · Date Code: 2026-07-18 00:33 ET</a:t>
             </a:r>
           </a:p>
         </p:txBody>
@@ -10171,7 +10171,7 @@
                 </a:solidFill>
                 <a:latin typeface="Arial"/>
               </a:rPr>
-              <a:t>The ServiceNow Compliance App · Date Code: 2026-07-14 11:56 ET</a:t>
+              <a:t>The ServiceNow Compliance App · Date Code: 2026-07-18 00:33 ET</a:t>
             </a:r>
           </a:p>
         </p:txBody>
@@ -10829,7 +10829,7 @@
                 </a:solidFill>
                 <a:latin typeface="Arial"/>
               </a:rPr>
-              <a:t>The ServiceNow Compliance App · Date Code: 2026-07-14 11:56 ET</a:t>
+              <a:t>The ServiceNow Compliance App · Date Code: 2026-07-18 00:33 ET</a:t>
             </a:r>
           </a:p>
         </p:txBody>

--- a/docs/customer-documents/federal-aan-series/Vol_VII_Book_05_FedAAN_ServiceNow_Compliance_App.pptx
+++ b/docs/customer-documents/federal-aan-series/Vol_VII_Book_05_FedAAN_ServiceNow_Compliance_App.pptx
@@ -516,7 +516,7 @@
           <a:p/>
           <a:p>
             <a:r>
-              <a:t>Vendor sources: uiao repo: infoblox-ddi-book/servicenow-app/</a:t>
+              <a:t>Vendor sources: host repo: infoblox-ddi-book/servicenow-app/</a:t>
             </a:r>
           </a:p>
         </p:txBody>
@@ -738,7 +738,7 @@
           <a:p/>
           <a:p>
             <a:r>
-              <a:t>Vendor sources: uiao repo: infoblox-ddi-book/servicenow-app/</a:t>
+              <a:t>Vendor sources: host repo: infoblox-ddi-book/servicenow-app/</a:t>
             </a:r>
           </a:p>
         </p:txBody>
@@ -814,7 +814,7 @@
           <a:p/>
           <a:p>
             <a:r>
-              <a:t>Vendor sources: uiao repo: infoblox-ddi-book/servicenow-app/</a:t>
+              <a:t>Vendor sources: host repo: infoblox-ddi-book/servicenow-app/</a:t>
             </a:r>
           </a:p>
         </p:txBody>
@@ -890,7 +890,7 @@
           <a:p/>
           <a:p>
             <a:r>
-              <a:t>Vendor sources: uiao repo: infoblox-ddi-book/servicenow-app/</a:t>
+              <a:t>Vendor sources: host repo: infoblox-ddi-book/servicenow-app/</a:t>
             </a:r>
           </a:p>
         </p:txBody>
@@ -966,7 +966,7 @@
           <a:p/>
           <a:p>
             <a:r>
-              <a:t>Vendor sources: uiao repo: infoblox-ddi-book/servicenow-app/</a:t>
+              <a:t>Vendor sources: host repo: infoblox-ddi-book/servicenow-app/</a:t>
             </a:r>
           </a:p>
         </p:txBody>
@@ -1042,7 +1042,7 @@
           <a:p/>
           <a:p>
             <a:r>
-              <a:t>Vendor sources: uiao repo: infoblox-ddi-book/servicenow-app/</a:t>
+              <a:t>Vendor sources: host repo: infoblox-ddi-book/servicenow-app/</a:t>
             </a:r>
           </a:p>
         </p:txBody>
